--- a/content/decks/media-studies/media-studies-s1-lesson-02-semiotics-how-images-mean.pptx
+++ b/content/decks/media-studies/media-studies-s1-lesson-02-semiotics-how-images-mean.pptx
@@ -513,7 +513,7 @@
           <a:p>
             <a:r>
               <a:rPr lang="en-US" dirty="0"/>
-              <a:t>Monday cashes last week's cheque: the words circled in the CS1 exit swap finally get their name, connotation.</a:t>
+              <a:t>The words circled in the CS1 exit swap get their name on Monday. The name is connotation.</a:t>
             </a:r>
             <a:endParaRPr lang="en-US" dirty="0"/>
           </a:p>
@@ -865,7 +865,7 @@
           <a:p>
             <a:r>
               <a:rPr lang="en-US" dirty="0"/>
-              <a:t>Semiotics is a screwdriver, not a philosophy. This week it takes the sign apart and hands the parts back with names.</a:t>
+              <a:t>Semiotics is a tool, not a philosophy. This week it takes the sign apart and hands the parts back with names.</a:t>
             </a:r>
             <a:endParaRPr lang="en-US" dirty="0"/>
           </a:p>
@@ -2122,7 +2122,7 @@
       </p:grpSpPr>
       <p:pic>
         <p:nvPicPr>
-          <p:cNvPr id="2" name="Image 0" descr="/private/tmp/claude-501/-Users-dogan-Documents-Vaults-Courses/a3a5132d-721f-4cd4-8ddd-e62e2b37b51b/scratchpad/img/crops/underwood-sweetheart_a1777.jpg">    </p:cNvPr>
+          <p:cNvPr id="2" name="Image 0" descr="/Users/dogan/Documents/Vaults/Courses/wiki/classes/media-studies/decks/_build/img/crops/underwood-sweetheart_a1777.jpg">    </p:cNvPr>
           <p:cNvPicPr>
             <a:picLocks noChangeAspect="1"/>
           </p:cNvPicPr>
@@ -4592,7 +4592,7 @@
       </p:grpSpPr>
       <p:pic>
         <p:nvPicPr>
-          <p:cNvPr id="2" name="Image 0" descr="/private/tmp/claude-501/-Users-dogan-Documents-Vaults-Courses/a3a5132d-721f-4cd4-8ddd-e62e2b37b51b/scratchpad/img/crops/redoute-rose_a637.jpg">    </p:cNvPr>
+          <p:cNvPr id="2" name="Image 0" descr="/Users/dogan/Documents/Vaults/Courses/wiki/classes/media-studies/decks/_build/img/crops/redoute-rose_a637.jpg">    </p:cNvPr>
           <p:cNvPicPr>
             <a:picLocks noChangeAspect="1"/>
           </p:cNvPicPr>
@@ -4964,7 +4964,7 @@
                 <a:ea typeface="Arial" pitchFamily="34" charset="-122"/>
                 <a:cs typeface="Arial" pitchFamily="34" charset="-120"/>
               </a:rPr>
-              <a:t>THE ROOM'S TWO LANGUAGES ARE THE DATA</a:t>
+              <a:t>THE CLOSING ASIDE: WHERE CULTURES DIVERGE</a:t>
             </a:r>
             <a:endParaRPr lang="en-US" sz="1100" dirty="0"/>
           </a:p>
@@ -5623,6 +5623,71 @@
         </p:nvSpPr>
         <p:spPr>
           <a:xfrm>
+            <a:off x="822960" y="4709160"/>
+            <a:ext cx="914400" cy="0"/>
+          </a:xfrm>
+          <a:prstGeom prst="line">
+            <a:avLst/>
+          </a:prstGeom>
+          <a:noFill/>
+          <a:ln w="31750">
+            <a:solidFill>
+              <a:srgbClr val="8C3A38"/>
+            </a:solidFill>
+            <a:prstDash val="solid"/>
+          </a:ln>
+        </p:spPr>
+      </p:sp>
+      <p:sp>
+        <p:nvSpPr>
+          <p:cNvPr id="24" name="Text 22"/>
+          <p:cNvSpPr/>
+          <p:nvPr/>
+        </p:nvSpPr>
+        <p:spPr>
+          <a:xfrm>
+            <a:off x="822960" y="4892040"/>
+            <a:ext cx="10543032" cy="640080"/>
+          </a:xfrm>
+          <a:prstGeom prst="rect">
+            <a:avLst/>
+          </a:prstGeom>
+          <a:noFill/>
+          <a:ln/>
+        </p:spPr>
+        <p:txBody>
+          <a:bodyPr wrap="square" lIns="0" tIns="0" rIns="0" bIns="0" rtlCol="0" anchor="t"/>
+          <a:lstStyle/>
+          <a:p>
+            <a:pPr indent="0" marL="0">
+              <a:lnSpc>
+                <a:spcPts val="1700"/>
+              </a:lnSpc>
+              <a:buNone/>
+            </a:pPr>
+            <a:r>
+              <a:rPr lang="en-US" sz="1250" i="1" dirty="0">
+                <a:solidFill>
+                  <a:srgbClr val="7A7F72"/>
+                </a:solidFill>
+                <a:latin typeface="Arial" pitchFamily="34" charset="0"/>
+                <a:ea typeface="Arial" pitchFamily="34" charset="-122"/>
+                <a:cs typeface="Arial" pitchFamily="34" charset="-120"/>
+              </a:rPr>
+              <a:t>The core runs on the sets a Cambridge extract trades in: red, white, black, the rose, the dove, the suit. This aside proves the wheel is culture-bound; the paper only ever asks about the first set.</a:t>
+            </a:r>
+            <a:endParaRPr lang="en-US" sz="1250" dirty="0"/>
+          </a:p>
+        </p:txBody>
+      </p:sp>
+      <p:sp>
+        <p:nvSpPr>
+          <p:cNvPr id="25" name="Shape 23"/>
+          <p:cNvSpPr/>
+          <p:nvPr/>
+        </p:nvSpPr>
+        <p:spPr>
+          <a:xfrm>
             <a:off x="822960" y="6382512"/>
             <a:ext cx="10543032" cy="0"/>
           </a:xfrm>
@@ -5640,7 +5705,7 @@
       </p:sp>
       <p:sp>
         <p:nvSpPr>
-          <p:cNvPr id="24" name="Text 22"/>
+          <p:cNvPr id="26" name="Text 24"/>
           <p:cNvSpPr/>
           <p:nvPr/>
         </p:nvSpPr>
@@ -5679,7 +5744,7 @@
       </p:sp>
       <p:sp>
         <p:nvSpPr>
-          <p:cNvPr id="25" name="Text 23"/>
+          <p:cNvPr id="27" name="Text 25"/>
           <p:cNvSpPr/>
           <p:nvPr/>
         </p:nvSpPr>
